--- a/classes/parte-2-deep-learning/158-gans-dcgan-progressive-gan-stylegan/clase-158-gans-dcgan-progressive-gan-stylegan-presentacion.pptx
+++ b/classes/parte-2-deep-learning/158-gans-dcgan-progressive-gan-stylegan/clase-158-gans-dcgan-progressive-gan-stylegan-presentacion.pptx
@@ -4932,7 +4932,254 @@
                 </a:solidFill>
                 <a:latin typeface="Courier New"/>
               </a:rPr>
-              <a:t># Imports y configuración inicial</a:t>
+              <a:t>try:</a:t>
+            </a:r>
+          </a:p>
+          <a:p>
+            <a:pPr>
+              <a:defRPr sz="1200" b="0">
+                <a:solidFill>
+                  <a:srgbClr val="F8FAFC"/>
+                </a:solidFill>
+                <a:latin typeface="Courier New"/>
+              </a:defRPr>
+            </a:pPr>
+            <a:r>
+              <a:rPr sz="1200" b="0">
+                <a:solidFill>
+                  <a:srgbClr val="F8FAFC"/>
+                </a:solidFill>
+                <a:latin typeface="Courier New"/>
+              </a:rPr>
+              <a:t>    import tensorflow as tf</a:t>
+            </a:r>
+          </a:p>
+          <a:p>
+            <a:pPr>
+              <a:defRPr sz="1200" b="0">
+                <a:solidFill>
+                  <a:srgbClr val="F8FAFC"/>
+                </a:solidFill>
+                <a:latin typeface="Courier New"/>
+              </a:defRPr>
+            </a:pPr>
+            <a:r>
+              <a:rPr sz="1200" b="0">
+                <a:solidFill>
+                  <a:srgbClr val="F8FAFC"/>
+                </a:solidFill>
+                <a:latin typeface="Courier New"/>
+              </a:rPr>
+              <a:t>    from tensorflow import keras</a:t>
+            </a:r>
+          </a:p>
+          <a:p>
+            <a:pPr>
+              <a:defRPr sz="1200" b="0">
+                <a:solidFill>
+                  <a:srgbClr val="F8FAFC"/>
+                </a:solidFill>
+                <a:latin typeface="Courier New"/>
+              </a:defRPr>
+            </a:pPr>
+            <a:r>
+              <a:rPr sz="1200" b="0">
+                <a:solidFill>
+                  <a:srgbClr val="F8FAFC"/>
+                </a:solidFill>
+                <a:latin typeface="Courier New"/>
+              </a:rPr>
+              <a:t>    from tensorflow.keras import layers</a:t>
+            </a:r>
+          </a:p>
+          <a:p>
+            <a:pPr>
+              <a:defRPr sz="1200" b="0">
+                <a:solidFill>
+                  <a:srgbClr val="F8FAFC"/>
+                </a:solidFill>
+                <a:latin typeface="Courier New"/>
+              </a:defRPr>
+            </a:pPr>
+            <a:r>
+              <a:rPr sz="1200" b="0">
+                <a:solidFill>
+                  <a:srgbClr val="F8FAFC"/>
+                </a:solidFill>
+                <a:latin typeface="Courier New"/>
+              </a:rPr>
+              <a:t>    HAS_TF = True</a:t>
+            </a:r>
+          </a:p>
+          <a:p>
+            <a:pPr>
+              <a:defRPr sz="1200" b="0">
+                <a:solidFill>
+                  <a:srgbClr val="F8FAFC"/>
+                </a:solidFill>
+                <a:latin typeface="Courier New"/>
+              </a:defRPr>
+            </a:pPr>
+            <a:r>
+              <a:rPr sz="1200" b="0">
+                <a:solidFill>
+                  <a:srgbClr val="F8FAFC"/>
+                </a:solidFill>
+                <a:latin typeface="Courier New"/>
+              </a:rPr>
+              <a:t>    tf.random.set_seed(42)</a:t>
+            </a:r>
+          </a:p>
+          <a:p>
+            <a:pPr>
+              <a:defRPr sz="1200" b="0">
+                <a:solidFill>
+                  <a:srgbClr val="F8FAFC"/>
+                </a:solidFill>
+                <a:latin typeface="Courier New"/>
+              </a:defRPr>
+            </a:pPr>
+            <a:r>
+              <a:rPr sz="1200" b="0">
+                <a:solidFill>
+                  <a:srgbClr val="F8FAFC"/>
+                </a:solidFill>
+                <a:latin typeface="Courier New"/>
+              </a:rPr>
+              <a:t>    print('tensorflow:', tf.__version__)</a:t>
+            </a:r>
+          </a:p>
+          <a:p>
+            <a:pPr>
+              <a:defRPr sz="1200" b="0">
+                <a:solidFill>
+                  <a:srgbClr val="F8FAFC"/>
+                </a:solidFill>
+                <a:latin typeface="Courier New"/>
+              </a:defRPr>
+            </a:pPr>
+            <a:r>
+              <a:rPr sz="1200" b="0">
+                <a:solidFill>
+                  <a:srgbClr val="F8FAFC"/>
+                </a:solidFill>
+                <a:latin typeface="Courier New"/>
+              </a:rPr>
+              <a:t>except Exception as e:</a:t>
+            </a:r>
+          </a:p>
+          <a:p>
+            <a:pPr>
+              <a:defRPr sz="1200" b="0">
+                <a:solidFill>
+                  <a:srgbClr val="F8FAFC"/>
+                </a:solidFill>
+                <a:latin typeface="Courier New"/>
+              </a:defRPr>
+            </a:pPr>
+            <a:r>
+              <a:rPr sz="1200" b="0">
+                <a:solidFill>
+                  <a:srgbClr val="F8FAFC"/>
+                </a:solidFill>
+                <a:latin typeface="Courier New"/>
+              </a:rPr>
+              <a:t>    HAS_TF = False</a:t>
+            </a:r>
+          </a:p>
+          <a:p>
+            <a:pPr>
+              <a:defRPr sz="1200" b="0">
+                <a:solidFill>
+                  <a:srgbClr val="F8FAFC"/>
+                </a:solidFill>
+                <a:latin typeface="Courier New"/>
+              </a:defRPr>
+            </a:pPr>
+            <a:r>
+              <a:rPr sz="1200" b="0">
+                <a:solidFill>
+                  <a:srgbClr val="F8FAFC"/>
+                </a:solidFill>
+                <a:latin typeface="Courier New"/>
+              </a:rPr>
+              <a:t>    print('tensorflow no instalado. Motivo:', type(e).__name__)</a:t>
+            </a:r>
+          </a:p>
+          <a:p>
+            <a:pPr>
+              <a:defRPr sz="1200" b="0">
+                <a:solidFill>
+                  <a:srgbClr val="F8FAFC"/>
+                </a:solidFill>
+                <a:latin typeface="Courier New"/>
+              </a:defRPr>
+            </a:pPr>
+            <a:r>
+              <a:rPr sz="1200" b="0">
+                <a:solidFill>
+                  <a:srgbClr val="F8FAFC"/>
+                </a:solidFill>
+                <a:latin typeface="Courier New"/>
+              </a:rPr>
+              <a:t> </a:t>
+            </a:r>
+          </a:p>
+          <a:p>
+            <a:pPr>
+              <a:defRPr sz="1200" b="0">
+                <a:solidFill>
+                  <a:srgbClr val="F8FAFC"/>
+                </a:solidFill>
+                <a:latin typeface="Courier New"/>
+              </a:defRPr>
+            </a:pPr>
+            <a:r>
+              <a:rPr sz="1200" b="0">
+                <a:solidFill>
+                  <a:srgbClr val="F8FAFC"/>
+                </a:solidFill>
+                <a:latin typeface="Courier New"/>
+              </a:rPr>
+              <a:t>import numpy as np</a:t>
+            </a:r>
+          </a:p>
+          <a:p>
+            <a:pPr>
+              <a:defRPr sz="1200" b="0">
+                <a:solidFill>
+                  <a:srgbClr val="F8FAFC"/>
+                </a:solidFill>
+                <a:latin typeface="Courier New"/>
+              </a:defRPr>
+            </a:pPr>
+            <a:r>
+              <a:rPr sz="1200" b="0">
+                <a:solidFill>
+                  <a:srgbClr val="F8FAFC"/>
+                </a:solidFill>
+                <a:latin typeface="Courier New"/>
+              </a:rPr>
+              <a:t>np.random.seed(42)</a:t>
+            </a:r>
+          </a:p>
+          <a:p>
+            <a:pPr>
+              <a:defRPr sz="1200" b="0">
+                <a:solidFill>
+                  <a:srgbClr val="F8FAFC"/>
+                </a:solidFill>
+                <a:latin typeface="Courier New"/>
+              </a:defRPr>
+            </a:pPr>
+            <a:r>
+              <a:rPr sz="1200" b="0">
+                <a:solidFill>
+                  <a:srgbClr val="F8FAFC"/>
+                </a:solidFill>
+                <a:latin typeface="Courier New"/>
+              </a:rPr>
+              <a:t>LATENT = 100</a:t>
             </a:r>
           </a:p>
         </p:txBody>

--- a/classes/parte-2-deep-learning/158-gans-dcgan-progressive-gan-stylegan/clase-158-gans-dcgan-progressive-gan-stylegan-presentacion.pptx
+++ b/classes/parte-2-deep-learning/158-gans-dcgan-progressive-gan-stylegan/clase-158-gans-dcgan-progressive-gan-stylegan-presentacion.pptx
@@ -3272,7 +3272,7 @@
                 </a:solidFill>
                 <a:latin typeface="Segoe UI"/>
               </a:rPr>
-              <a:t>Parte: 2 — Deep Learning · Fuente: Géron, cap. 17 § Generative Adversarial Networks + Goodfellow (2014).  Duración estimada: 80 min.</a:t>
+              <a:t>Parte: 2 — Deep Learning · Fuente: Géron, cap. 17 § Generative Adversarial Networks + Goodfellow (2014).  Duración estimada: 80 min. · Nivel: Avanzado</a:t>
             </a:r>
           </a:p>
         </p:txBody>
@@ -3581,7 +3581,7 @@
                 </a:solidFill>
                 <a:latin typeface="Segoe UI"/>
               </a:rPr>
-              <a:t>Parte: 2 — Deep Learning · Fuente: Géron, cap. 17 § Generative Adversarial Networks + Goodfellow (2014).  Duración estimada: 80 min.</a:t>
+              <a:t>Parte: 2 — Deep Learning · Fuente: Géron, cap. 17 § Generative Adversarial Networks + Goodfellow (2014).  Duración estimada: 80 min. · Nivel: Avanzado</a:t>
             </a:r>
           </a:p>
         </p:txBody>
